--- a/Management.pptx
+++ b/Management.pptx
@@ -19891,11 +19891,11 @@
           <a:lstStyle/>
           <a:p>
             <a:r>
-              <a:rPr lang="en-US"/>
+              <a:rPr lang="en-US" dirty="0"/>
               <a:t>According to </a:t>
             </a:r>
             <a:r>
-              <a:rPr lang="en-US" b="1">
+              <a:rPr lang="en-US" b="1" dirty="0">
                 <a:solidFill>
                   <a:srgbClr val="FF0000"/>
                 </a:solidFill>
@@ -19903,11 +19903,11 @@
               <a:t>Peter Diamandis</a:t>
             </a:r>
             <a:r>
-              <a:rPr lang="en-US"/>
-              <a:t>, successful people (self-made billionairs) tend to have an attitude which can be expressed as following:  </a:t>
-            </a:r>
-            <a:r>
-              <a:rPr lang="en-US" b="1">
+              <a:rPr lang="en-US" dirty="0"/>
+              <a:t>, successful people (self-made billionaires) tend to have an attitude which can be expressed as following:  </a:t>
+            </a:r>
+            <a:r>
+              <a:rPr lang="en-US" b="1" dirty="0">
                 <a:solidFill>
                   <a:srgbClr val="FF0000"/>
                 </a:solidFill>
@@ -19916,27 +19916,35 @@
             </a:r>
           </a:p>
           <a:p>
-            <a:endParaRPr lang="en-US"/>
-          </a:p>
-          <a:p>
-            <a:r>
-              <a:rPr lang="en-US"/>
+            <a:endParaRPr lang="en-US" dirty="0"/>
+          </a:p>
+          <a:p>
+            <a:r>
+              <a:rPr lang="en-US" dirty="0"/>
               <a:t>In 1951 </a:t>
             </a:r>
             <a:r>
-              <a:rPr lang="en-US" b="1">
+              <a:rPr lang="en-US" b="1" dirty="0">
                 <a:solidFill>
                   <a:srgbClr val="FF0000"/>
                 </a:solidFill>
               </a:rPr>
-              <a:t>Nikolai Pertsov</a:t>
-            </a:r>
-            <a:r>
-              <a:rPr lang="en-US"/>
+              <a:t>Nikolai </a:t>
+            </a:r>
+            <a:r>
+              <a:rPr lang="en-US" b="1" dirty="0" err="1">
+                <a:solidFill>
+                  <a:srgbClr val="FF0000"/>
+                </a:solidFill>
+              </a:rPr>
+              <a:t>Pertsov</a:t>
+            </a:r>
+            <a:r>
+              <a:rPr lang="en-US" dirty="0"/>
               <a:t> was appointed as a Director of </a:t>
             </a:r>
             <a:r>
-              <a:rPr lang="en-US" b="1">
+              <a:rPr lang="en-US" b="1" dirty="0">
                 <a:solidFill>
                   <a:srgbClr val="00B050"/>
                 </a:solidFill>
@@ -19944,28 +19952,52 @@
               <a:t>White Sea Biological Station of Moscow State University</a:t>
             </a:r>
             <a:r>
-              <a:rPr lang="en-US"/>
-              <a:t>. When he arrived at the place designated as Belomorskaya Biostation MSU, there was nothing there except for a small shed – a "cabin" and several tents.</a:t>
-            </a:r>
-          </a:p>
-          <a:p>
-            <a:endParaRPr lang="en-US"/>
-          </a:p>
-          <a:p>
-            <a:r>
-              <a:rPr lang="en-US" b="1">
+              <a:rPr lang="en-US" dirty="0"/>
+              <a:t>. When he arrived at the place designated as </a:t>
+            </a:r>
+            <a:r>
+              <a:rPr lang="en-US" dirty="0" err="1"/>
+              <a:t>Belomorskaya</a:t>
+            </a:r>
+            <a:r>
+              <a:rPr lang="en-US" dirty="0"/>
+              <a:t> </a:t>
+            </a:r>
+            <a:r>
+              <a:rPr lang="en-US" dirty="0" err="1"/>
+              <a:t>Biostation</a:t>
+            </a:r>
+            <a:r>
+              <a:rPr lang="en-US" dirty="0"/>
+              <a:t> MSU, there was nothing there except for a small shed – a "cabin" and several tents.</a:t>
+            </a:r>
+          </a:p>
+          <a:p>
+            <a:endParaRPr lang="en-US" dirty="0"/>
+          </a:p>
+          <a:p>
+            <a:r>
+              <a:rPr lang="en-US" b="1" dirty="0">
                 <a:solidFill>
                   <a:srgbClr val="FF0000"/>
                 </a:solidFill>
               </a:rPr>
-              <a:t>Nikolai Pertsov</a:t>
-            </a:r>
-            <a:r>
-              <a:rPr lang="en-US"/>
+              <a:t>Nikolai </a:t>
+            </a:r>
+            <a:r>
+              <a:rPr lang="en-US" b="1" dirty="0" err="1">
+                <a:solidFill>
+                  <a:srgbClr val="FF0000"/>
+                </a:solidFill>
+              </a:rPr>
+              <a:t>Pertsov</a:t>
+            </a:r>
+            <a:r>
+              <a:rPr lang="en-US" dirty="0"/>
               <a:t> launched intense activity. </a:t>
             </a:r>
             <a:r>
-              <a:rPr lang="en-US" b="1">
+              <a:rPr lang="en-US" b="1" dirty="0">
                 <a:solidFill>
                   <a:srgbClr val="00B050"/>
                 </a:solidFill>
@@ -19973,7 +20005,7 @@
               <a:t>He didn't have the necessary funds</a:t>
             </a:r>
             <a:r>
-              <a:rPr lang="en-US">
+              <a:rPr lang="en-US" dirty="0">
                 <a:solidFill>
                   <a:srgbClr val="00B050"/>
                 </a:solidFill>
@@ -19981,11 +20013,11 @@
               <a:t>.</a:t>
             </a:r>
             <a:r>
-              <a:rPr lang="en-US"/>
+              <a:rPr lang="en-US" dirty="0"/>
               <a:t>  </a:t>
             </a:r>
             <a:r>
-              <a:rPr lang="en-US" b="1">
+              <a:rPr lang="en-US" b="1" dirty="0">
                 <a:solidFill>
                   <a:srgbClr val="FF0000"/>
                 </a:solidFill>
@@ -19993,37 +20025,45 @@
               <a:t>But he was good at captivating people with enthusiasm</a:t>
             </a:r>
             <a:r>
-              <a:rPr lang="en-US"/>
+              <a:rPr lang="en-US" dirty="0"/>
               <a:t>. He has built a laboratory and homes, got hold of the present fleet of several boats, laid electric and telephone lines</a:t>
             </a:r>
             <a:r>
-              <a:rPr lang="ru-RU"/>
+              <a:rPr lang="ru-RU" dirty="0"/>
               <a:t> </a:t>
             </a:r>
             <a:r>
-              <a:rPr lang="en-US"/>
+              <a:rPr lang="en-US" dirty="0"/>
               <a:t>through miles of "taiga" (forest), provided necessary scientific and educational equipment.</a:t>
             </a:r>
           </a:p>
           <a:p>
-            <a:endParaRPr lang="en-US"/>
-          </a:p>
-          <a:p>
-            <a:r>
-              <a:rPr lang="en-US"/>
-              <a:t>Nowadays hundreds of students and staff are comming to the bio-station every year. Dozens of books, thousands of scientific articles, hundreds of PhD degrees, thousands of trained professionals - this is the result of the activity led by Nikolai Pertsov's bio-station.</a:t>
-            </a:r>
-          </a:p>
-          <a:p>
-            <a:endParaRPr lang="en-US"/>
-          </a:p>
-          <a:p>
-            <a:r>
-              <a:rPr lang="en-US"/>
+            <a:endParaRPr lang="en-US" dirty="0"/>
+          </a:p>
+          <a:p>
+            <a:r>
+              <a:rPr lang="en-US" dirty="0"/>
+              <a:t>Nowadays hundreds of students and staff are coming to the bio-station every year. Dozens of books, thousands of scientific articles, hundreds of PhD degrees, thousands of trained professionals - this is the result of the activity led by Nikolai </a:t>
+            </a:r>
+            <a:r>
+              <a:rPr lang="en-US" dirty="0" err="1"/>
+              <a:t>Pertsov's</a:t>
+            </a:r>
+            <a:r>
+              <a:rPr lang="en-US" dirty="0"/>
+              <a:t> bio-station.</a:t>
+            </a:r>
+          </a:p>
+          <a:p>
+            <a:endParaRPr lang="en-US" dirty="0"/>
+          </a:p>
+          <a:p>
+            <a:r>
+              <a:rPr lang="en-US" dirty="0"/>
               <a:t>The really interesting fact about the history of the station is that </a:t>
             </a:r>
             <a:r>
-              <a:rPr lang="en-US" b="1">
+              <a:rPr lang="en-US" b="1" dirty="0">
                 <a:solidFill>
                   <a:srgbClr val="00B050"/>
                 </a:solidFill>
@@ -20031,50 +20071,58 @@
               <a:t>almost all construction work was done by volunteers</a:t>
             </a:r>
             <a:r>
-              <a:rPr lang="en-US"/>
+              <a:rPr lang="en-US" dirty="0"/>
               <a:t>. </a:t>
             </a:r>
             <a:r>
-              <a:rPr lang="en-US" b="1">
+              <a:rPr lang="en-US" b="1" dirty="0">
                 <a:solidFill>
                   <a:srgbClr val="FF0000"/>
                 </a:solidFill>
               </a:rPr>
-              <a:t>Nikolai Pertsov</a:t>
-            </a:r>
-            <a:r>
-              <a:rPr lang="en-US"/>
-              <a:t> had an amazing skill of making people enthusiastic about the project and making them wilingly work on it.</a:t>
-            </a:r>
-          </a:p>
-          <a:p>
-            <a:endParaRPr lang="en-US"/>
-          </a:p>
-          <a:p>
-            <a:r>
-              <a:rPr lang="en-US"/>
+              <a:t>Nikolai </a:t>
+            </a:r>
+            <a:r>
+              <a:rPr lang="en-US" b="1" dirty="0" err="1">
+                <a:solidFill>
+                  <a:srgbClr val="FF0000"/>
+                </a:solidFill>
+              </a:rPr>
+              <a:t>Pertsov</a:t>
+            </a:r>
+            <a:r>
+              <a:rPr lang="en-US" dirty="0"/>
+              <a:t> had an amazing skill of making people enthusiastic about the project and making them willingly work on it.</a:t>
+            </a:r>
+          </a:p>
+          <a:p>
+            <a:endParaRPr lang="en-US" dirty="0"/>
+          </a:p>
+          <a:p>
+            <a:r>
+              <a:rPr lang="en-US" dirty="0"/>
               <a:t> - </a:t>
             </a:r>
             <a:r>
-              <a:rPr lang="en-US">
+              <a:rPr lang="en-US" dirty="0">
                 <a:hlinkClick r:id="rId3"/>
               </a:rPr>
               <a:t>https://en.wikipedia.org/wiki/White_Sea_Biological_Station</a:t>
             </a:r>
-            <a:endParaRPr lang="en-US"/>
-          </a:p>
-          <a:p>
-            <a:r>
-              <a:rPr lang="en-US"/>
+            <a:endParaRPr lang="en-US" dirty="0"/>
+          </a:p>
+          <a:p>
+            <a:r>
+              <a:rPr lang="en-US" dirty="0"/>
               <a:t> - </a:t>
             </a:r>
             <a:r>
-              <a:rPr lang="en-US">
+              <a:rPr lang="en-US" dirty="0">
                 <a:hlinkClick r:id="rId4"/>
               </a:rPr>
               <a:t>https://persona.rin.ru/eng/view/f/0/21543/pertsov-nikolai-andreevich</a:t>
             </a:r>
-            <a:endParaRPr lang="en-US"/>
+            <a:endParaRPr lang="en-US" dirty="0"/>
           </a:p>
         </p:txBody>
       </p:sp>
